--- a/Paper/Figures/Host_Classifier_Corners.pptx
+++ b/Paper/Figures/Host_Classifier_Corners.pptx
@@ -199,7 +199,7 @@
           <a:p>
             <a:fld id="{3E840A23-4CF7-534D-AC06-2045128FCD9D}" type="datetimeFigureOut">
               <a:rPr lang="en-US" smtClean="0"/>
-              <a:t>4/11/25</a:t>
+              <a:t>12/9/25</a:t>
             </a:fld>
             <a:endParaRPr lang="en-US"/>
           </a:p>
@@ -697,7 +697,7 @@
           <a:p>
             <a:fld id="{2A84BB07-332C-1548-AD14-D9691F2F01CF}" type="datetimeFigureOut">
               <a:rPr lang="en-US" smtClean="0"/>
-              <a:t>4/11/25</a:t>
+              <a:t>12/9/25</a:t>
             </a:fld>
             <a:endParaRPr lang="en-US"/>
           </a:p>
@@ -895,7 +895,7 @@
           <a:p>
             <a:fld id="{2A84BB07-332C-1548-AD14-D9691F2F01CF}" type="datetimeFigureOut">
               <a:rPr lang="en-US" smtClean="0"/>
-              <a:t>4/11/25</a:t>
+              <a:t>12/9/25</a:t>
             </a:fld>
             <a:endParaRPr lang="en-US"/>
           </a:p>
@@ -1103,7 +1103,7 @@
           <a:p>
             <a:fld id="{2A84BB07-332C-1548-AD14-D9691F2F01CF}" type="datetimeFigureOut">
               <a:rPr lang="en-US" smtClean="0"/>
-              <a:t>4/11/25</a:t>
+              <a:t>12/9/25</a:t>
             </a:fld>
             <a:endParaRPr lang="en-US"/>
           </a:p>
@@ -1301,7 +1301,7 @@
           <a:p>
             <a:fld id="{2A84BB07-332C-1548-AD14-D9691F2F01CF}" type="datetimeFigureOut">
               <a:rPr lang="en-US" smtClean="0"/>
-              <a:t>4/11/25</a:t>
+              <a:t>12/9/25</a:t>
             </a:fld>
             <a:endParaRPr lang="en-US"/>
           </a:p>
@@ -1576,7 +1576,7 @@
           <a:p>
             <a:fld id="{2A84BB07-332C-1548-AD14-D9691F2F01CF}" type="datetimeFigureOut">
               <a:rPr lang="en-US" smtClean="0"/>
-              <a:t>4/11/25</a:t>
+              <a:t>12/9/25</a:t>
             </a:fld>
             <a:endParaRPr lang="en-US"/>
           </a:p>
@@ -1841,7 +1841,7 @@
           <a:p>
             <a:fld id="{2A84BB07-332C-1548-AD14-D9691F2F01CF}" type="datetimeFigureOut">
               <a:rPr lang="en-US" smtClean="0"/>
-              <a:t>4/11/25</a:t>
+              <a:t>12/9/25</a:t>
             </a:fld>
             <a:endParaRPr lang="en-US"/>
           </a:p>
@@ -2253,7 +2253,7 @@
           <a:p>
             <a:fld id="{2A84BB07-332C-1548-AD14-D9691F2F01CF}" type="datetimeFigureOut">
               <a:rPr lang="en-US" smtClean="0"/>
-              <a:t>4/11/25</a:t>
+              <a:t>12/9/25</a:t>
             </a:fld>
             <a:endParaRPr lang="en-US"/>
           </a:p>
@@ -2394,7 +2394,7 @@
           <a:p>
             <a:fld id="{2A84BB07-332C-1548-AD14-D9691F2F01CF}" type="datetimeFigureOut">
               <a:rPr lang="en-US" smtClean="0"/>
-              <a:t>4/11/25</a:t>
+              <a:t>12/9/25</a:t>
             </a:fld>
             <a:endParaRPr lang="en-US"/>
           </a:p>
@@ -2507,7 +2507,7 @@
           <a:p>
             <a:fld id="{2A84BB07-332C-1548-AD14-D9691F2F01CF}" type="datetimeFigureOut">
               <a:rPr lang="en-US" smtClean="0"/>
-              <a:t>4/11/25</a:t>
+              <a:t>12/9/25</a:t>
             </a:fld>
             <a:endParaRPr lang="en-US"/>
           </a:p>
@@ -2818,7 +2818,7 @@
           <a:p>
             <a:fld id="{2A84BB07-332C-1548-AD14-D9691F2F01CF}" type="datetimeFigureOut">
               <a:rPr lang="en-US" smtClean="0"/>
-              <a:t>4/11/25</a:t>
+              <a:t>12/9/25</a:t>
             </a:fld>
             <a:endParaRPr lang="en-US"/>
           </a:p>
@@ -3106,7 +3106,7 @@
           <a:p>
             <a:fld id="{2A84BB07-332C-1548-AD14-D9691F2F01CF}" type="datetimeFigureOut">
               <a:rPr lang="en-US" smtClean="0"/>
-              <a:t>4/11/25</a:t>
+              <a:t>12/9/25</a:t>
             </a:fld>
             <a:endParaRPr lang="en-US"/>
           </a:p>
@@ -3347,7 +3347,7 @@
           <a:p>
             <a:fld id="{2A84BB07-332C-1548-AD14-D9691F2F01CF}" type="datetimeFigureOut">
               <a:rPr lang="en-US" smtClean="0"/>
-              <a:t>4/11/25</a:t>
+              <a:t>12/9/25</a:t>
             </a:fld>
             <a:endParaRPr lang="en-US"/>
           </a:p>
@@ -3766,10 +3766,10 @@
       </p:grpSpPr>
       <p:pic>
         <p:nvPicPr>
-          <p:cNvPr id="3" name="Picture 2">
-            <a:extLst>
-              <a:ext uri="{FF2B5EF4-FFF2-40B4-BE49-F238E27FC236}">
-                <a16:creationId xmlns:a16="http://schemas.microsoft.com/office/drawing/2014/main" id="{8796C5A3-7551-AD22-9C94-F5917A9B12C1}"/>
+          <p:cNvPr id="7" name="Picture 6">
+            <a:extLst>
+              <a:ext uri="{FF2B5EF4-FFF2-40B4-BE49-F238E27FC236}">
+                <a16:creationId xmlns:a16="http://schemas.microsoft.com/office/drawing/2014/main" id="{0EA8A23F-E9CF-018E-B314-E5895B92FFDE}"/>
               </a:ext>
             </a:extLst>
           </p:cNvPr>
@@ -3786,7 +3786,7 @@
         </p:blipFill>
         <p:spPr>
           <a:xfrm>
-            <a:off x="4647971" y="0"/>
+            <a:off x="0" y="0"/>
             <a:ext cx="4647971" cy="4295173"/>
           </a:xfrm>
           <a:prstGeom prst="rect">
@@ -3796,10 +3796,10 @@
       </p:pic>
       <p:pic>
         <p:nvPicPr>
-          <p:cNvPr id="6" name="Picture 5">
-            <a:extLst>
-              <a:ext uri="{FF2B5EF4-FFF2-40B4-BE49-F238E27FC236}">
-                <a16:creationId xmlns:a16="http://schemas.microsoft.com/office/drawing/2014/main" id="{DDAFE11D-14B1-81C3-B010-ED1861FD165A}"/>
+          <p:cNvPr id="4" name="Picture 3">
+            <a:extLst>
+              <a:ext uri="{FF2B5EF4-FFF2-40B4-BE49-F238E27FC236}">
+                <a16:creationId xmlns:a16="http://schemas.microsoft.com/office/drawing/2014/main" id="{F84BA27F-261F-B80B-B481-915A18800A2A}"/>
               </a:ext>
             </a:extLst>
           </p:cNvPr>
@@ -3816,8 +3816,8 @@
         </p:blipFill>
         <p:spPr>
           <a:xfrm>
-            <a:off x="0" y="-1"/>
-            <a:ext cx="4647971" cy="4295173"/>
+            <a:off x="4647971" y="-1"/>
+            <a:ext cx="4647970" cy="4295172"/>
           </a:xfrm>
           <a:prstGeom prst="rect">
             <a:avLst/>
